--- a/slide_presentasi/SESI_05_Layout_Grid_Form_Regex_Dark_Mode.pptx
+++ b/slide_presentasi/SESI_05_Layout_Grid_Form_Regex_Dark_Mode.pptx
@@ -3156,8 +3156,8 @@
         </p:nvSpPr>
         <p:spPr>
           <a:xfrm>
-            <a:off x="896112" y="896112"/>
-            <a:ext cx="10545775" cy="5212080"/>
+            <a:off x="896112" y="530352"/>
+            <a:ext cx="10545775" cy="5897880"/>
           </a:xfrm>
           <a:prstGeom prst="rect">
             <a:avLst/>
@@ -3199,8 +3199,8 @@
         </p:nvSpPr>
         <p:spPr>
           <a:xfrm>
-            <a:off x="822960" y="822960"/>
-            <a:ext cx="10545775" cy="5212080"/>
+            <a:off x="822960" y="457200"/>
+            <a:ext cx="10545775" cy="5897880"/>
           </a:xfrm>
           <a:prstGeom prst="rect">
             <a:avLst/>
@@ -3244,8 +3244,8 @@
         </p:nvSpPr>
         <p:spPr>
           <a:xfrm>
-            <a:off x="1280160" y="1188720"/>
-            <a:ext cx="9601200" cy="4389120"/>
+            <a:off x="1097280" y="594360"/>
+            <a:ext cx="9997135" cy="1371600"/>
           </a:xfrm>
           <a:prstGeom prst="rect">
             <a:avLst/>
@@ -3260,9 +3260,9 @@
           <a:p>
             <a:pPr>
               <a:spcAft>
-                <a:spcPts val="1600"/>
+                <a:spcPts val="400"/>
               </a:spcAft>
-              <a:defRPr sz="1200" b="1">
+              <a:defRPr sz="1100" b="1">
                 <a:solidFill>
                   <a:srgbClr val="000000"/>
                 </a:solidFill>
@@ -3276,9 +3276,9 @@
           <a:p>
             <a:pPr>
               <a:spcAft>
-                <a:spcPts val="1400"/>
+                <a:spcPts val="400"/>
               </a:spcAft>
-              <a:defRPr sz="2600" b="1">
+              <a:defRPr sz="2200" b="1">
                 <a:solidFill>
                   <a:srgbClr val="000000"/>
                 </a:solidFill>
@@ -3291,10 +3291,535 @@
           </a:p>
           <a:p>
             <a:pPr>
+              <a:defRPr sz="1050">
+                <a:solidFill>
+                  <a:srgbClr val="464646"/>
+                </a:solidFill>
+                <a:latin typeface="Segoe UI"/>
+              </a:defRPr>
+            </a:pPr>
+            <a:r>
+              <a:t>Mata Kuliah: Pemrograman Berbasis Perangkat Bergerak (STSI4303 / MSIM4401)</a:t>
+            </a:r>
+            <a:br/>
+            <a:r>
+              <a:t>Modul Acuan BMP: Modul 5 • 12-Column Grid, Kontrol Formulir, Validasi Regex, Dark Mode, &amp; Evaluasi TUGAS 2 (20%)</a:t>
+            </a:r>
+          </a:p>
+        </p:txBody>
+      </p:sp>
+      <p:sp>
+        <p:nvSpPr>
+          <p:cNvPr id="6" name="Rectangle 5"/>
+          <p:cNvSpPr/>
+          <p:nvPr/>
+        </p:nvSpPr>
+        <p:spPr>
+          <a:xfrm>
+            <a:off x="1170432" y="2130552"/>
+            <a:ext cx="4864608" cy="2468880"/>
+          </a:xfrm>
+          <a:prstGeom prst="rect">
+            <a:avLst/>
+          </a:prstGeom>
+          <a:solidFill>
+            <a:srgbClr val="000000"/>
+          </a:solidFill>
+          <a:ln>
+            <a:noFill/>
+          </a:ln>
+        </p:spPr>
+        <p:style>
+          <a:lnRef idx="1">
+            <a:schemeClr val="accent1"/>
+          </a:lnRef>
+          <a:fillRef idx="3">
+            <a:schemeClr val="accent1"/>
+          </a:fillRef>
+          <a:effectRef idx="2">
+            <a:schemeClr val="accent1"/>
+          </a:effectRef>
+          <a:fontRef idx="minor">
+            <a:schemeClr val="lt1"/>
+          </a:fontRef>
+        </p:style>
+        <p:txBody>
+          <a:bodyPr rtlCol="0" anchor="ctr"/>
+          <a:lstStyle/>
+          <a:p>
+            <a:pPr algn="ctr"/>
+          </a:p>
+        </p:txBody>
+      </p:sp>
+      <p:sp>
+        <p:nvSpPr>
+          <p:cNvPr id="7" name="Rectangle 6"/>
+          <p:cNvSpPr/>
+          <p:nvPr/>
+        </p:nvSpPr>
+        <p:spPr>
+          <a:xfrm>
+            <a:off x="1097280" y="2057400"/>
+            <a:ext cx="4864608" cy="2468880"/>
+          </a:xfrm>
+          <a:prstGeom prst="rect">
+            <a:avLst/>
+          </a:prstGeom>
+          <a:solidFill>
+            <a:srgbClr val="F5F3FF"/>
+          </a:solidFill>
+          <a:ln w="31750">
+            <a:solidFill>
+              <a:srgbClr val="000000"/>
+            </a:solidFill>
+          </a:ln>
+        </p:spPr>
+        <p:style>
+          <a:lnRef idx="1">
+            <a:schemeClr val="accent1"/>
+          </a:lnRef>
+          <a:fillRef idx="3">
+            <a:schemeClr val="accent1"/>
+          </a:fillRef>
+          <a:effectRef idx="2">
+            <a:schemeClr val="accent1"/>
+          </a:effectRef>
+          <a:fontRef idx="minor">
+            <a:schemeClr val="lt1"/>
+          </a:fontRef>
+        </p:style>
+        <p:txBody>
+          <a:bodyPr rtlCol="0" anchor="ctr"/>
+          <a:lstStyle/>
+          <a:p>
+            <a:pPr algn="ctr"/>
+          </a:p>
+        </p:txBody>
+      </p:sp>
+      <p:sp>
+        <p:nvSpPr>
+          <p:cNvPr id="8" name="TextBox 7"/>
+          <p:cNvSpPr txBox="1"/>
+          <p:nvPr/>
+        </p:nvSpPr>
+        <p:spPr>
+          <a:xfrm>
+            <a:off x="1280160" y="2194560"/>
+            <a:ext cx="4498848" cy="2194560"/>
+          </a:xfrm>
+          <a:prstGeom prst="rect">
+            <a:avLst/>
+          </a:prstGeom>
+          <a:noFill/>
+        </p:spPr>
+        <p:txBody>
+          <a:bodyPr wrap="square">
+            <a:spAutoFit/>
+          </a:bodyPr>
+          <a:lstStyle/>
+          <a:p>
+            <a:pPr>
               <a:spcAft>
-                <a:spcPts val="3600"/>
+                <a:spcPts val="600"/>
               </a:spcAft>
-              <a:defRPr sz="1350">
+              <a:defRPr sz="1100" b="1">
+                <a:solidFill>
+                  <a:srgbClr val="581C87"/>
+                </a:solidFill>
+                <a:latin typeface="Segoe UI"/>
+              </a:defRPr>
+            </a:pPr>
+            <a:r>
+              <a:t>🎯 PETA KURIKULUM &amp; TAGIHAN TUGAS 2</a:t>
+            </a:r>
+          </a:p>
+          <a:p>
+            <a:pPr>
+              <a:spcAft>
+                <a:spcPts val="400"/>
+              </a:spcAft>
+              <a:defRPr sz="950">
+                <a:solidFill>
+                  <a:srgbClr val="1E1E1E"/>
+                </a:solidFill>
+                <a:latin typeface="Segoe UI"/>
+              </a:defRPr>
+            </a:pPr>
+            <a:r>
+              <a:t>■  Transisi Antarmuka Mobile: Menguasai Sistem 12-Kolom Ionic Grid.</a:t>
+            </a:r>
+          </a:p>
+          <a:p>
+            <a:pPr>
+              <a:spcAft>
+                <a:spcPts val="400"/>
+              </a:spcAft>
+              <a:defRPr sz="950">
+                <a:solidFill>
+                  <a:srgbClr val="1E1E1E"/>
+                </a:solidFill>
+                <a:latin typeface="Segoe UI"/>
+              </a:defRPr>
+            </a:pPr>
+            <a:r>
+              <a:t>■  Formulir Masukan Cerdas: Floating Label, Auto-grow, &amp; DateTime.</a:t>
+            </a:r>
+          </a:p>
+          <a:p>
+            <a:pPr>
+              <a:spcAft>
+                <a:spcPts val="400"/>
+              </a:spcAft>
+              <a:defRPr sz="950">
+                <a:solidFill>
+                  <a:srgbClr val="1E1E1E"/>
+                </a:solidFill>
+                <a:latin typeface="Segoe UI"/>
+              </a:defRPr>
+            </a:pPr>
+            <a:r>
+              <a:t>■  Integritas Data: Validasi Reaktif Pola Regex NIM &amp; Email Kampus.</a:t>
+            </a:r>
+          </a:p>
+          <a:p>
+            <a:pPr>
+              <a:spcAft>
+                <a:spcPts val="400"/>
+              </a:spcAft>
+              <a:defRPr sz="950">
+                <a:solidFill>
+                  <a:srgbClr val="1E1E1E"/>
+                </a:solidFill>
+                <a:latin typeface="Segoe UI"/>
+              </a:defRPr>
+            </a:pPr>
+            <a:r>
+              <a:t>■  Milestone Asesmen: TUGAS TUTORIAL 2 (Bobot 20% Nilai Tuton UT).</a:t>
+            </a:r>
+          </a:p>
+        </p:txBody>
+      </p:sp>
+      <p:sp>
+        <p:nvSpPr>
+          <p:cNvPr id="9" name="Rectangle 8"/>
+          <p:cNvSpPr/>
+          <p:nvPr/>
+        </p:nvSpPr>
+        <p:spPr>
+          <a:xfrm>
+            <a:off x="6302959" y="2130552"/>
+            <a:ext cx="4864608" cy="2468880"/>
+          </a:xfrm>
+          <a:prstGeom prst="rect">
+            <a:avLst/>
+          </a:prstGeom>
+          <a:solidFill>
+            <a:srgbClr val="000000"/>
+          </a:solidFill>
+          <a:ln>
+            <a:noFill/>
+          </a:ln>
+        </p:spPr>
+        <p:style>
+          <a:lnRef idx="1">
+            <a:schemeClr val="accent1"/>
+          </a:lnRef>
+          <a:fillRef idx="3">
+            <a:schemeClr val="accent1"/>
+          </a:fillRef>
+          <a:effectRef idx="2">
+            <a:schemeClr val="accent1"/>
+          </a:effectRef>
+          <a:fontRef idx="minor">
+            <a:schemeClr val="lt1"/>
+          </a:fontRef>
+        </p:style>
+        <p:txBody>
+          <a:bodyPr rtlCol="0" anchor="ctr"/>
+          <a:lstStyle/>
+          <a:p>
+            <a:pPr algn="ctr"/>
+          </a:p>
+        </p:txBody>
+      </p:sp>
+      <p:sp>
+        <p:nvSpPr>
+          <p:cNvPr id="10" name="Rectangle 9"/>
+          <p:cNvSpPr/>
+          <p:nvPr/>
+        </p:nvSpPr>
+        <p:spPr>
+          <a:xfrm>
+            <a:off x="6229807" y="2057400"/>
+            <a:ext cx="4864608" cy="2468880"/>
+          </a:xfrm>
+          <a:prstGeom prst="rect">
+            <a:avLst/>
+          </a:prstGeom>
+          <a:solidFill>
+            <a:srgbClr val="FEF3C7"/>
+          </a:solidFill>
+          <a:ln w="31750">
+            <a:solidFill>
+              <a:srgbClr val="000000"/>
+            </a:solidFill>
+          </a:ln>
+        </p:spPr>
+        <p:style>
+          <a:lnRef idx="1">
+            <a:schemeClr val="accent1"/>
+          </a:lnRef>
+          <a:fillRef idx="3">
+            <a:schemeClr val="accent1"/>
+          </a:fillRef>
+          <a:effectRef idx="2">
+            <a:schemeClr val="accent1"/>
+          </a:effectRef>
+          <a:fontRef idx="minor">
+            <a:schemeClr val="lt1"/>
+          </a:fontRef>
+        </p:style>
+        <p:txBody>
+          <a:bodyPr rtlCol="0" anchor="ctr"/>
+          <a:lstStyle/>
+          <a:p>
+            <a:pPr algn="ctr"/>
+          </a:p>
+        </p:txBody>
+      </p:sp>
+      <p:sp>
+        <p:nvSpPr>
+          <p:cNvPr id="11" name="TextBox 10"/>
+          <p:cNvSpPr txBox="1"/>
+          <p:nvPr/>
+        </p:nvSpPr>
+        <p:spPr>
+          <a:xfrm>
+            <a:off x="6412687" y="2194560"/>
+            <a:ext cx="4498848" cy="2194560"/>
+          </a:xfrm>
+          <a:prstGeom prst="rect">
+            <a:avLst/>
+          </a:prstGeom>
+          <a:noFill/>
+        </p:spPr>
+        <p:txBody>
+          <a:bodyPr wrap="square">
+            <a:spAutoFit/>
+          </a:bodyPr>
+          <a:lstStyle/>
+          <a:p>
+            <a:pPr>
+              <a:spcAft>
+                <a:spcPts val="600"/>
+              </a:spcAft>
+              <a:defRPr sz="1100" b="1">
+                <a:solidFill>
+                  <a:srgbClr val="92400E"/>
+                </a:solidFill>
+                <a:latin typeface="Segoe UI"/>
+              </a:defRPr>
+            </a:pPr>
+            <a:r>
+              <a:t>📱 FOKUS SESI 05: GRID, REGEX &amp; THEME</a:t>
+            </a:r>
+          </a:p>
+          <a:p>
+            <a:pPr>
+              <a:spcAft>
+                <a:spcPts val="400"/>
+              </a:spcAft>
+              <a:defRPr sz="950">
+                <a:solidFill>
+                  <a:srgbClr val="1E1E1E"/>
+                </a:solidFill>
+                <a:latin typeface="Segoe UI"/>
+              </a:defRPr>
+            </a:pPr>
+            <a:r>
+              <a:t>■  Breakpoints Responsif: Adaptasi Layar Ponsel Portrait vs Tablet.</a:t>
+            </a:r>
+          </a:p>
+          <a:p>
+            <a:pPr>
+              <a:spcAft>
+                <a:spcPts val="400"/>
+              </a:spcAft>
+              <a:defRPr sz="950">
+                <a:solidFill>
+                  <a:srgbClr val="1E1E1E"/>
+                </a:solidFill>
+                <a:latin typeface="Segoe UI"/>
+              </a:defRPr>
+            </a:pPr>
+            <a:r>
+              <a:t>■  Manajemen Status UX: Penanganan Pristine, Dirty, &amp; Touched.</a:t>
+            </a:r>
+          </a:p>
+          <a:p>
+            <a:pPr>
+              <a:spcAft>
+                <a:spcPts val="400"/>
+              </a:spcAft>
+              <a:defRPr sz="950">
+                <a:solidFill>
+                  <a:srgbClr val="1E1E1E"/>
+                </a:solidFill>
+                <a:latin typeface="Segoe UI"/>
+              </a:defRPr>
+            </a:pPr>
+            <a:r>
+              <a:t>■  Dialog Interaktif: Konfirmasi ion-alert &amp; Notifikasi ion-toast.</a:t>
+            </a:r>
+          </a:p>
+          <a:p>
+            <a:pPr>
+              <a:spcAft>
+                <a:spcPts val="400"/>
+              </a:spcAft>
+              <a:defRPr sz="950">
+                <a:solidFill>
+                  <a:srgbClr val="1E1E1E"/>
+                </a:solidFill>
+                <a:latin typeface="Segoe UI"/>
+              </a:defRPr>
+            </a:pPr>
+            <a:r>
+              <a:t>■  Dynamic Theming: Variabel CSS, prefers-color-scheme, &amp; Dark Mode.</a:t>
+            </a:r>
+          </a:p>
+        </p:txBody>
+      </p:sp>
+      <p:sp>
+        <p:nvSpPr>
+          <p:cNvPr id="12" name="Rectangle 11"/>
+          <p:cNvSpPr/>
+          <p:nvPr/>
+        </p:nvSpPr>
+        <p:spPr>
+          <a:xfrm>
+            <a:off x="1133856" y="4745736"/>
+            <a:ext cx="9997135" cy="621792"/>
+          </a:xfrm>
+          <a:prstGeom prst="rect">
+            <a:avLst/>
+          </a:prstGeom>
+          <a:solidFill>
+            <a:srgbClr val="000000"/>
+          </a:solidFill>
+          <a:ln>
+            <a:noFill/>
+          </a:ln>
+        </p:spPr>
+        <p:style>
+          <a:lnRef idx="1">
+            <a:schemeClr val="accent1"/>
+          </a:lnRef>
+          <a:fillRef idx="3">
+            <a:schemeClr val="accent1"/>
+          </a:fillRef>
+          <a:effectRef idx="2">
+            <a:schemeClr val="accent1"/>
+          </a:effectRef>
+          <a:fontRef idx="minor">
+            <a:schemeClr val="lt1"/>
+          </a:fontRef>
+        </p:style>
+        <p:txBody>
+          <a:bodyPr rtlCol="0" anchor="ctr"/>
+          <a:lstStyle/>
+          <a:p>
+            <a:pPr algn="ctr"/>
+          </a:p>
+        </p:txBody>
+      </p:sp>
+      <p:sp>
+        <p:nvSpPr>
+          <p:cNvPr id="13" name="Rectangle 12">
+            <a:hlinkClick r:id="rId2"/>
+          </p:cNvPr>
+          <p:cNvSpPr/>
+          <p:nvPr/>
+        </p:nvSpPr>
+        <p:spPr>
+          <a:xfrm>
+            <a:off x="1097280" y="4709160"/>
+            <a:ext cx="9997135" cy="621792"/>
+          </a:xfrm>
+          <a:prstGeom prst="rect">
+            <a:avLst/>
+          </a:prstGeom>
+          <a:solidFill>
+            <a:srgbClr val="FFE600"/>
+          </a:solidFill>
+          <a:ln w="25400">
+            <a:solidFill>
+              <a:srgbClr val="000000"/>
+            </a:solidFill>
+          </a:ln>
+        </p:spPr>
+        <p:style>
+          <a:lnRef idx="1">
+            <a:schemeClr val="accent1"/>
+          </a:lnRef>
+          <a:fillRef idx="3">
+            <a:schemeClr val="accent1"/>
+          </a:fillRef>
+          <a:effectRef idx="2">
+            <a:schemeClr val="accent1"/>
+          </a:effectRef>
+          <a:fontRef idx="minor">
+            <a:schemeClr val="lt1"/>
+          </a:fontRef>
+        </p:style>
+        <p:txBody>
+          <a:bodyPr rtlCol="0" anchor="ctr"/>
+          <a:lstStyle/>
+          <a:p>
+            <a:pPr algn="ctr"/>
+          </a:p>
+        </p:txBody>
+      </p:sp>
+      <p:sp>
+        <p:nvSpPr>
+          <p:cNvPr id="14" name="TextBox 13"/>
+          <p:cNvSpPr txBox="1"/>
+          <p:nvPr/>
+        </p:nvSpPr>
+        <p:spPr>
+          <a:xfrm>
+            <a:off x="1188720" y="4745736"/>
+            <a:ext cx="9814255" cy="548640"/>
+          </a:xfrm>
+          <a:prstGeom prst="rect">
+            <a:avLst/>
+          </a:prstGeom>
+          <a:noFill/>
+        </p:spPr>
+        <p:txBody>
+          <a:bodyPr wrap="square">
+            <a:spAutoFit/>
+          </a:bodyPr>
+          <a:lstStyle/>
+          <a:p>
+            <a:pPr>
+              <a:spcAft>
+                <a:spcPts val="200"/>
+              </a:spcAft>
+              <a:defRPr sz="1000" b="1">
+                <a:solidFill>
+                  <a:srgbClr val="000000"/>
+                </a:solidFill>
+                <a:latin typeface="Segoe UI"/>
+              </a:defRPr>
+            </a:pPr>
+            <a:r>
+              <a:t>▶ KLIK DI SINI UNTUK MEMBUKA BERKAS INTERAKTIF ORIENTASI SESI 05 (slide_01_orientasi_sesi_dan_tugas_2.html)</a:t>
+            </a:r>
+          </a:p>
+          <a:p>
+            <a:pPr>
+              <a:defRPr sz="850">
                 <a:solidFill>
                   <a:srgbClr val="3C3C3C"/>
                 </a:solidFill>
@@ -3302,24 +3827,7 @@
               </a:defRPr>
             </a:pPr>
             <a:r>
-              <a:t>Mata Kuliah: Pemrograman Berbasis Perangkat Bergerak (STSI4303 / MSIM4401)</a:t>
-            </a:r>
-            <a:br/>
-            <a:r>
-              <a:t>Modul Acuan BMP: Modul 5 • 12-Column Grid, Kontrol Formulir, Validasi Regex, Dark Mode, &amp; Evaluasi TUGAS 2 (20%)</a:t>
-            </a:r>
-          </a:p>
-          <a:p>
-            <a:pPr>
-              <a:defRPr sz="1150" b="1">
-                <a:solidFill>
-                  <a:srgbClr val="000000"/>
-                </a:solidFill>
-                <a:latin typeface="Segoe UI"/>
-              </a:defRPr>
-            </a:pPr>
-            <a:r>
-              <a:t>■  Anton Prafanto, S.Kom., M.T.  ■  FAKULTAS SAINS DAN TEKNOLOGI • UNIVERSITAS TERBUKA</a:t>
+              <a:t>■ Anton Prafanto, S.Kom., M.T. ■ FAKULTAS SAINS DAN TEKNOLOGI • UNIVERSITAS TERBUKA • EKSEKUSI LANGSUNG DI GOOGLE CHROME</a:t>
             </a:r>
           </a:p>
         </p:txBody>
@@ -6857,7 +7365,7 @@
         <p:spPr>
           <a:xfrm>
             <a:off x="896112" y="1719072"/>
-            <a:ext cx="5120640" cy="4663440"/>
+            <a:ext cx="5120640" cy="4160520"/>
           </a:xfrm>
           <a:prstGeom prst="rect">
             <a:avLst/>
@@ -6900,7 +7408,7 @@
         <p:spPr>
           <a:xfrm>
             <a:off x="822960" y="1645920"/>
-            <a:ext cx="5120640" cy="4663440"/>
+            <a:ext cx="5120640" cy="4160520"/>
           </a:xfrm>
           <a:prstGeom prst="rect">
             <a:avLst/>
@@ -7026,7 +7534,7 @@
         <p:spPr>
           <a:xfrm>
             <a:off x="1051560" y="2468880"/>
-            <a:ext cx="4663440" cy="3657600"/>
+            <a:ext cx="4663440" cy="3291840"/>
           </a:xfrm>
           <a:prstGeom prst="rect">
             <a:avLst/>
@@ -7114,7 +7622,7 @@
         <p:spPr>
           <a:xfrm>
             <a:off x="6321247" y="1719072"/>
-            <a:ext cx="5120640" cy="4663440"/>
+            <a:ext cx="5120640" cy="4160520"/>
           </a:xfrm>
           <a:prstGeom prst="rect">
             <a:avLst/>
@@ -7157,7 +7665,7 @@
         <p:spPr>
           <a:xfrm>
             <a:off x="6248095" y="1645920"/>
-            <a:ext cx="5120640" cy="4663440"/>
+            <a:ext cx="5120640" cy="4160520"/>
           </a:xfrm>
           <a:prstGeom prst="rect">
             <a:avLst/>
@@ -7283,7 +7791,7 @@
         <p:spPr>
           <a:xfrm>
             <a:off x="6476695" y="2468880"/>
-            <a:ext cx="4663440" cy="3657600"/>
+            <a:ext cx="4663440" cy="3291840"/>
           </a:xfrm>
           <a:prstGeom prst="rect">
             <a:avLst/>
@@ -7358,6 +7866,89 @@
             </a:pPr>
             <a:r>
               <a:t>■  Kriteria penilaian wajib berbobot 20 poin pada Tugas Tutorial 2!</a:t>
+            </a:r>
+          </a:p>
+        </p:txBody>
+      </p:sp>
+      <p:sp>
+        <p:nvSpPr>
+          <p:cNvPr id="17" name="Rectangle 16">
+            <a:hlinkClick r:id="rId2"/>
+          </p:cNvPr>
+          <p:cNvSpPr/>
+          <p:nvPr/>
+        </p:nvSpPr>
+        <p:spPr>
+          <a:xfrm>
+            <a:off x="822960" y="5989320"/>
+            <a:ext cx="10545775" cy="384048"/>
+          </a:xfrm>
+          <a:prstGeom prst="rect">
+            <a:avLst/>
+          </a:prstGeom>
+          <a:solidFill>
+            <a:srgbClr val="FFE600"/>
+          </a:solidFill>
+          <a:ln w="19050">
+            <a:solidFill>
+              <a:srgbClr val="000000"/>
+            </a:solidFill>
+          </a:ln>
+        </p:spPr>
+        <p:style>
+          <a:lnRef idx="1">
+            <a:schemeClr val="accent1"/>
+          </a:lnRef>
+          <a:fillRef idx="3">
+            <a:schemeClr val="accent1"/>
+          </a:fillRef>
+          <a:effectRef idx="2">
+            <a:schemeClr val="accent1"/>
+          </a:effectRef>
+          <a:fontRef idx="minor">
+            <a:schemeClr val="lt1"/>
+          </a:fontRef>
+        </p:style>
+        <p:txBody>
+          <a:bodyPr rtlCol="0" anchor="ctr"/>
+          <a:lstStyle/>
+          <a:p>
+            <a:pPr algn="ctr"/>
+          </a:p>
+        </p:txBody>
+      </p:sp>
+      <p:sp>
+        <p:nvSpPr>
+          <p:cNvPr id="18" name="TextBox 17"/>
+          <p:cNvSpPr txBox="1"/>
+          <p:nvPr/>
+        </p:nvSpPr>
+        <p:spPr>
+          <a:xfrm>
+            <a:off x="822960" y="5989320"/>
+            <a:ext cx="10545775" cy="384048"/>
+          </a:xfrm>
+          <a:prstGeom prst="rect">
+            <a:avLst/>
+          </a:prstGeom>
+          <a:noFill/>
+        </p:spPr>
+        <p:txBody>
+          <a:bodyPr wrap="none">
+            <a:spAutoFit/>
+          </a:bodyPr>
+          <a:lstStyle/>
+          <a:p>
+            <a:pPr>
+              <a:defRPr sz="950" b="1">
+                <a:solidFill>
+                  <a:srgbClr val="000000"/>
+                </a:solidFill>
+                <a:latin typeface="Segoe UI"/>
+              </a:defRPr>
+            </a:pPr>
+            <a:r>
+              <a:t>▶ KLIK UNTUK MEMBUKA KODE LENGKAP (slide_14_arsitektur_tema_gelap_dark_mode.html)</a:t>
             </a:r>
           </a:p>
         </p:txBody>
@@ -8452,7 +9043,7 @@
         <p:spPr>
           <a:xfrm>
             <a:off x="896112" y="1719072"/>
-            <a:ext cx="5120640" cy="2148840"/>
+            <a:ext cx="5120640" cy="1965960"/>
           </a:xfrm>
           <a:prstGeom prst="rect">
             <a:avLst/>
@@ -8495,7 +9086,7 @@
         <p:spPr>
           <a:xfrm>
             <a:off x="822960" y="1645920"/>
-            <a:ext cx="5120640" cy="2148840"/>
+            <a:ext cx="5120640" cy="1965960"/>
           </a:xfrm>
           <a:prstGeom prst="rect">
             <a:avLst/>
@@ -8621,7 +9212,7 @@
         <p:spPr>
           <a:xfrm>
             <a:off x="1005840" y="2240280"/>
-            <a:ext cx="4754880" cy="1463040"/>
+            <a:ext cx="4754880" cy="1280160"/>
           </a:xfrm>
           <a:prstGeom prst="rect">
             <a:avLst/>
@@ -8673,7 +9264,7 @@
         <p:spPr>
           <a:xfrm>
             <a:off x="6321247" y="1719072"/>
-            <a:ext cx="5120640" cy="2148840"/>
+            <a:ext cx="5120640" cy="1965960"/>
           </a:xfrm>
           <a:prstGeom prst="rect">
             <a:avLst/>
@@ -8716,7 +9307,7 @@
         <p:spPr>
           <a:xfrm>
             <a:off x="6248095" y="1645920"/>
-            <a:ext cx="5120640" cy="2148840"/>
+            <a:ext cx="5120640" cy="1965960"/>
           </a:xfrm>
           <a:prstGeom prst="rect">
             <a:avLst/>
@@ -8842,7 +9433,7 @@
         <p:spPr>
           <a:xfrm>
             <a:off x="6430975" y="2240280"/>
-            <a:ext cx="4754880" cy="1463040"/>
+            <a:ext cx="4754880" cy="1280160"/>
           </a:xfrm>
           <a:prstGeom prst="rect">
             <a:avLst/>
@@ -8893,8 +9484,8 @@
         </p:nvSpPr>
         <p:spPr>
           <a:xfrm>
-            <a:off x="896112" y="4096512"/>
-            <a:ext cx="5120640" cy="2148840"/>
+            <a:off x="896112" y="3867912"/>
+            <a:ext cx="5120640" cy="1965960"/>
           </a:xfrm>
           <a:prstGeom prst="rect">
             <a:avLst/>
@@ -8936,8 +9527,8 @@
         </p:nvSpPr>
         <p:spPr>
           <a:xfrm>
-            <a:off x="822960" y="4023360"/>
-            <a:ext cx="5120640" cy="2148840"/>
+            <a:off x="822960" y="3794760"/>
+            <a:ext cx="5120640" cy="1965960"/>
           </a:xfrm>
           <a:prstGeom prst="rect">
             <a:avLst/>
@@ -8981,7 +9572,7 @@
         </p:nvSpPr>
         <p:spPr>
           <a:xfrm>
-            <a:off x="1005840" y="4206240"/>
+            <a:off x="1005840" y="3977640"/>
             <a:ext cx="1645920" cy="365760"/>
           </a:xfrm>
           <a:prstGeom prst="rect">
@@ -9026,7 +9617,7 @@
         </p:nvSpPr>
         <p:spPr>
           <a:xfrm>
-            <a:off x="1005840" y="4206240"/>
+            <a:off x="1005840" y="3977640"/>
             <a:ext cx="1645920" cy="365760"/>
           </a:xfrm>
           <a:prstGeom prst="rect">
@@ -9062,8 +9653,8 @@
         </p:nvSpPr>
         <p:spPr>
           <a:xfrm>
-            <a:off x="1005840" y="4617720"/>
-            <a:ext cx="4754880" cy="1463040"/>
+            <a:off x="1005840" y="4389120"/>
+            <a:ext cx="4754880" cy="1280160"/>
           </a:xfrm>
           <a:prstGeom prst="rect">
             <a:avLst/>
@@ -9114,8 +9705,8 @@
         </p:nvSpPr>
         <p:spPr>
           <a:xfrm>
-            <a:off x="6321247" y="4096512"/>
-            <a:ext cx="5120640" cy="2148840"/>
+            <a:off x="6321247" y="3867912"/>
+            <a:ext cx="5120640" cy="1965960"/>
           </a:xfrm>
           <a:prstGeom prst="rect">
             <a:avLst/>
@@ -9157,8 +9748,8 @@
         </p:nvSpPr>
         <p:spPr>
           <a:xfrm>
-            <a:off x="6248095" y="4023360"/>
-            <a:ext cx="5120640" cy="2148840"/>
+            <a:off x="6248095" y="3794760"/>
+            <a:ext cx="5120640" cy="1965960"/>
           </a:xfrm>
           <a:prstGeom prst="rect">
             <a:avLst/>
@@ -9202,7 +9793,7 @@
         </p:nvSpPr>
         <p:spPr>
           <a:xfrm>
-            <a:off x="6430975" y="4206240"/>
+            <a:off x="6430975" y="3977640"/>
             <a:ext cx="1645920" cy="365760"/>
           </a:xfrm>
           <a:prstGeom prst="rect">
@@ -9247,7 +9838,7 @@
         </p:nvSpPr>
         <p:spPr>
           <a:xfrm>
-            <a:off x="6430975" y="4206240"/>
+            <a:off x="6430975" y="3977640"/>
             <a:ext cx="1645920" cy="365760"/>
           </a:xfrm>
           <a:prstGeom prst="rect">
@@ -9283,8 +9874,8 @@
         </p:nvSpPr>
         <p:spPr>
           <a:xfrm>
-            <a:off x="6430975" y="4617720"/>
-            <a:ext cx="4754880" cy="1463040"/>
+            <a:off x="6430975" y="4389120"/>
+            <a:ext cx="4754880" cy="1280160"/>
           </a:xfrm>
           <a:prstGeom prst="rect">
             <a:avLst/>
@@ -9323,6 +9914,89 @@
             </a:pPr>
             <a:r>
               <a:t>Sakelar tema gelap-terang berfungsi mulus, preview KTM digital reaktif, dan link video YouTube 3-5 menit disertakan.</a:t>
+            </a:r>
+          </a:p>
+        </p:txBody>
+      </p:sp>
+      <p:sp>
+        <p:nvSpPr>
+          <p:cNvPr id="27" name="Rectangle 26">
+            <a:hlinkClick r:id="rId2"/>
+          </p:cNvPr>
+          <p:cNvSpPr/>
+          <p:nvPr/>
+        </p:nvSpPr>
+        <p:spPr>
+          <a:xfrm>
+            <a:off x="822960" y="5989320"/>
+            <a:ext cx="10545775" cy="384048"/>
+          </a:xfrm>
+          <a:prstGeom prst="rect">
+            <a:avLst/>
+          </a:prstGeom>
+          <a:solidFill>
+            <a:srgbClr val="FFE600"/>
+          </a:solidFill>
+          <a:ln w="19050">
+            <a:solidFill>
+              <a:srgbClr val="000000"/>
+            </a:solidFill>
+          </a:ln>
+        </p:spPr>
+        <p:style>
+          <a:lnRef idx="1">
+            <a:schemeClr val="accent1"/>
+          </a:lnRef>
+          <a:fillRef idx="3">
+            <a:schemeClr val="accent1"/>
+          </a:fillRef>
+          <a:effectRef idx="2">
+            <a:schemeClr val="accent1"/>
+          </a:effectRef>
+          <a:fontRef idx="minor">
+            <a:schemeClr val="lt1"/>
+          </a:fontRef>
+        </p:style>
+        <p:txBody>
+          <a:bodyPr rtlCol="0" anchor="ctr"/>
+          <a:lstStyle/>
+          <a:p>
+            <a:pPr algn="ctr"/>
+          </a:p>
+        </p:txBody>
+      </p:sp>
+      <p:sp>
+        <p:nvSpPr>
+          <p:cNvPr id="28" name="TextBox 27"/>
+          <p:cNvSpPr txBox="1"/>
+          <p:nvPr/>
+        </p:nvSpPr>
+        <p:spPr>
+          <a:xfrm>
+            <a:off x="822960" y="5989320"/>
+            <a:ext cx="10545775" cy="384048"/>
+          </a:xfrm>
+          <a:prstGeom prst="rect">
+            <a:avLst/>
+          </a:prstGeom>
+          <a:noFill/>
+        </p:spPr>
+        <p:txBody>
+          <a:bodyPr wrap="none">
+            <a:spAutoFit/>
+          </a:bodyPr>
+          <a:lstStyle/>
+          <a:p>
+            <a:pPr>
+              <a:defRPr sz="950" b="1">
+                <a:solidFill>
+                  <a:srgbClr val="000000"/>
+                </a:solidFill>
+                <a:latin typeface="Segoe UI"/>
+              </a:defRPr>
+            </a:pPr>
+            <a:r>
+              <a:t>▶ KLIK UNTUK MEMBUKA KODE LENGKAP (slide_16_rubrik_tugas_tutorial_2.html)</a:t>
             </a:r>
           </a:p>
         </p:txBody>
@@ -10397,7 +11071,7 @@
         <p:spPr>
           <a:xfrm>
             <a:off x="896112" y="1719072"/>
-            <a:ext cx="5120640" cy="2148840"/>
+            <a:ext cx="5120640" cy="1965960"/>
           </a:xfrm>
           <a:prstGeom prst="rect">
             <a:avLst/>
@@ -10440,7 +11114,7 @@
         <p:spPr>
           <a:xfrm>
             <a:off x="822960" y="1645920"/>
-            <a:ext cx="5120640" cy="2148840"/>
+            <a:ext cx="5120640" cy="1965960"/>
           </a:xfrm>
           <a:prstGeom prst="rect">
             <a:avLst/>
@@ -10566,7 +11240,7 @@
         <p:spPr>
           <a:xfrm>
             <a:off x="1005840" y="2240280"/>
-            <a:ext cx="4754880" cy="1463040"/>
+            <a:ext cx="4754880" cy="1280160"/>
           </a:xfrm>
           <a:prstGeom prst="rect">
             <a:avLst/>
@@ -10618,7 +11292,7 @@
         <p:spPr>
           <a:xfrm>
             <a:off x="6321247" y="1719072"/>
-            <a:ext cx="5120640" cy="2148840"/>
+            <a:ext cx="5120640" cy="1965960"/>
           </a:xfrm>
           <a:prstGeom prst="rect">
             <a:avLst/>
@@ -10661,7 +11335,7 @@
         <p:spPr>
           <a:xfrm>
             <a:off x="6248095" y="1645920"/>
-            <a:ext cx="5120640" cy="2148840"/>
+            <a:ext cx="5120640" cy="1965960"/>
           </a:xfrm>
           <a:prstGeom prst="rect">
             <a:avLst/>
@@ -10787,7 +11461,7 @@
         <p:spPr>
           <a:xfrm>
             <a:off x="6430975" y="2240280"/>
-            <a:ext cx="4754880" cy="1463040"/>
+            <a:ext cx="4754880" cy="1280160"/>
           </a:xfrm>
           <a:prstGeom prst="rect">
             <a:avLst/>
@@ -10838,8 +11512,8 @@
         </p:nvSpPr>
         <p:spPr>
           <a:xfrm>
-            <a:off x="896112" y="4096512"/>
-            <a:ext cx="5120640" cy="2148840"/>
+            <a:off x="896112" y="3867912"/>
+            <a:ext cx="5120640" cy="1965960"/>
           </a:xfrm>
           <a:prstGeom prst="rect">
             <a:avLst/>
@@ -10881,8 +11555,8 @@
         </p:nvSpPr>
         <p:spPr>
           <a:xfrm>
-            <a:off x="822960" y="4023360"/>
-            <a:ext cx="5120640" cy="2148840"/>
+            <a:off x="822960" y="3794760"/>
+            <a:ext cx="5120640" cy="1965960"/>
           </a:xfrm>
           <a:prstGeom prst="rect">
             <a:avLst/>
@@ -10926,7 +11600,7 @@
         </p:nvSpPr>
         <p:spPr>
           <a:xfrm>
-            <a:off x="1005840" y="4206240"/>
+            <a:off x="1005840" y="3977640"/>
             <a:ext cx="1645920" cy="365760"/>
           </a:xfrm>
           <a:prstGeom prst="rect">
@@ -10971,7 +11645,7 @@
         </p:nvSpPr>
         <p:spPr>
           <a:xfrm>
-            <a:off x="1005840" y="4206240"/>
+            <a:off x="1005840" y="3977640"/>
             <a:ext cx="1645920" cy="365760"/>
           </a:xfrm>
           <a:prstGeom prst="rect">
@@ -11007,8 +11681,8 @@
         </p:nvSpPr>
         <p:spPr>
           <a:xfrm>
-            <a:off x="1005840" y="4617720"/>
-            <a:ext cx="4754880" cy="1463040"/>
+            <a:off x="1005840" y="4389120"/>
+            <a:ext cx="4754880" cy="1280160"/>
           </a:xfrm>
           <a:prstGeom prst="rect">
             <a:avLst/>
@@ -11059,8 +11733,8 @@
         </p:nvSpPr>
         <p:spPr>
           <a:xfrm>
-            <a:off x="6321247" y="4096512"/>
-            <a:ext cx="5120640" cy="2148840"/>
+            <a:off x="6321247" y="3867912"/>
+            <a:ext cx="5120640" cy="1965960"/>
           </a:xfrm>
           <a:prstGeom prst="rect">
             <a:avLst/>
@@ -11102,8 +11776,8 @@
         </p:nvSpPr>
         <p:spPr>
           <a:xfrm>
-            <a:off x="6248095" y="4023360"/>
-            <a:ext cx="5120640" cy="2148840"/>
+            <a:off x="6248095" y="3794760"/>
+            <a:ext cx="5120640" cy="1965960"/>
           </a:xfrm>
           <a:prstGeom prst="rect">
             <a:avLst/>
@@ -11147,7 +11821,7 @@
         </p:nvSpPr>
         <p:spPr>
           <a:xfrm>
-            <a:off x="6430975" y="4206240"/>
+            <a:off x="6430975" y="3977640"/>
             <a:ext cx="1645920" cy="365760"/>
           </a:xfrm>
           <a:prstGeom prst="rect">
@@ -11192,7 +11866,7 @@
         </p:nvSpPr>
         <p:spPr>
           <a:xfrm>
-            <a:off x="6430975" y="4206240"/>
+            <a:off x="6430975" y="3977640"/>
             <a:ext cx="1645920" cy="365760"/>
           </a:xfrm>
           <a:prstGeom prst="rect">
@@ -11228,8 +11902,8 @@
         </p:nvSpPr>
         <p:spPr>
           <a:xfrm>
-            <a:off x="6430975" y="4617720"/>
-            <a:ext cx="4754880" cy="1463040"/>
+            <a:off x="6430975" y="4389120"/>
+            <a:ext cx="4754880" cy="1280160"/>
           </a:xfrm>
           <a:prstGeom prst="rect">
             <a:avLst/>
@@ -11268,6 +11942,89 @@
             </a:pPr>
             <a:r>
               <a:t>Solusi hemat RAM (4-8GB friendly): Menjalankan aplikasi langsung di smartphone fisik via USB Debugging!</a:t>
+            </a:r>
+          </a:p>
+        </p:txBody>
+      </p:sp>
+      <p:sp>
+        <p:nvSpPr>
+          <p:cNvPr id="27" name="Rectangle 26">
+            <a:hlinkClick r:id="rId2"/>
+          </p:cNvPr>
+          <p:cNvSpPr/>
+          <p:nvPr/>
+        </p:nvSpPr>
+        <p:spPr>
+          <a:xfrm>
+            <a:off x="822960" y="5989320"/>
+            <a:ext cx="10545775" cy="384048"/>
+          </a:xfrm>
+          <a:prstGeom prst="rect">
+            <a:avLst/>
+          </a:prstGeom>
+          <a:solidFill>
+            <a:srgbClr val="FFE600"/>
+          </a:solidFill>
+          <a:ln w="19050">
+            <a:solidFill>
+              <a:srgbClr val="000000"/>
+            </a:solidFill>
+          </a:ln>
+        </p:spPr>
+        <p:style>
+          <a:lnRef idx="1">
+            <a:schemeClr val="accent1"/>
+          </a:lnRef>
+          <a:fillRef idx="3">
+            <a:schemeClr val="accent1"/>
+          </a:fillRef>
+          <a:effectRef idx="2">
+            <a:schemeClr val="accent1"/>
+          </a:effectRef>
+          <a:fontRef idx="minor">
+            <a:schemeClr val="lt1"/>
+          </a:fontRef>
+        </p:style>
+        <p:txBody>
+          <a:bodyPr rtlCol="0" anchor="ctr"/>
+          <a:lstStyle/>
+          <a:p>
+            <a:pPr algn="ctr"/>
+          </a:p>
+        </p:txBody>
+      </p:sp>
+      <p:sp>
+        <p:nvSpPr>
+          <p:cNvPr id="28" name="TextBox 27"/>
+          <p:cNvSpPr txBox="1"/>
+          <p:nvPr/>
+        </p:nvSpPr>
+        <p:spPr>
+          <a:xfrm>
+            <a:off x="822960" y="5989320"/>
+            <a:ext cx="10545775" cy="384048"/>
+          </a:xfrm>
+          <a:prstGeom prst="rect">
+            <a:avLst/>
+          </a:prstGeom>
+          <a:noFill/>
+        </p:spPr>
+        <p:txBody>
+          <a:bodyPr wrap="none">
+            <a:spAutoFit/>
+          </a:bodyPr>
+          <a:lstStyle/>
+          <a:p>
+            <a:pPr>
+              <a:defRPr sz="950" b="1">
+                <a:solidFill>
+                  <a:srgbClr val="000000"/>
+                </a:solidFill>
+                <a:latin typeface="Segoe UI"/>
+              </a:defRPr>
+            </a:pPr>
+            <a:r>
+              <a:t>▶ KLIK UNTUK MEMBUKA KODE LENGKAP (slide_18_preview_sesi_06_capacitor_android.html)</a:t>
             </a:r>
           </a:p>
         </p:txBody>
@@ -12316,7 +13073,7 @@
         <p:spPr>
           <a:xfrm>
             <a:off x="896112" y="1719072"/>
-            <a:ext cx="5120640" cy="4663440"/>
+            <a:ext cx="5120640" cy="4160520"/>
           </a:xfrm>
           <a:prstGeom prst="rect">
             <a:avLst/>
@@ -12359,7 +13116,7 @@
         <p:spPr>
           <a:xfrm>
             <a:off x="822960" y="1645920"/>
-            <a:ext cx="5120640" cy="4663440"/>
+            <a:ext cx="5120640" cy="4160520"/>
           </a:xfrm>
           <a:prstGeom prst="rect">
             <a:avLst/>
@@ -12485,7 +13242,7 @@
         <p:spPr>
           <a:xfrm>
             <a:off x="1051560" y="2468880"/>
-            <a:ext cx="4663440" cy="3657600"/>
+            <a:ext cx="4663440" cy="3291840"/>
           </a:xfrm>
           <a:prstGeom prst="rect">
             <a:avLst/>
@@ -12573,7 +13330,7 @@
         <p:spPr>
           <a:xfrm>
             <a:off x="6321247" y="1719072"/>
-            <a:ext cx="5120640" cy="4663440"/>
+            <a:ext cx="5120640" cy="4160520"/>
           </a:xfrm>
           <a:prstGeom prst="rect">
             <a:avLst/>
@@ -12616,7 +13373,7 @@
         <p:spPr>
           <a:xfrm>
             <a:off x="6248095" y="1645920"/>
-            <a:ext cx="5120640" cy="4663440"/>
+            <a:ext cx="5120640" cy="4160520"/>
           </a:xfrm>
           <a:prstGeom prst="rect">
             <a:avLst/>
@@ -12742,7 +13499,7 @@
         <p:spPr>
           <a:xfrm>
             <a:off x="6476695" y="2468880"/>
-            <a:ext cx="4663440" cy="3657600"/>
+            <a:ext cx="4663440" cy="3291840"/>
           </a:xfrm>
           <a:prstGeom prst="rect">
             <a:avLst/>
@@ -12817,6 +13574,89 @@
             </a:pPr>
             <a:r>
               <a:t>■  Transisi mulus saat ponsel diputar mendatar secara real-time.</a:t>
+            </a:r>
+          </a:p>
+        </p:txBody>
+      </p:sp>
+      <p:sp>
+        <p:nvSpPr>
+          <p:cNvPr id="17" name="Rectangle 16">
+            <a:hlinkClick r:id="rId2"/>
+          </p:cNvPr>
+          <p:cNvSpPr/>
+          <p:nvPr/>
+        </p:nvSpPr>
+        <p:spPr>
+          <a:xfrm>
+            <a:off x="822960" y="5989320"/>
+            <a:ext cx="10545775" cy="384048"/>
+          </a:xfrm>
+          <a:prstGeom prst="rect">
+            <a:avLst/>
+          </a:prstGeom>
+          <a:solidFill>
+            <a:srgbClr val="FFE600"/>
+          </a:solidFill>
+          <a:ln w="19050">
+            <a:solidFill>
+              <a:srgbClr val="000000"/>
+            </a:solidFill>
+          </a:ln>
+        </p:spPr>
+        <p:style>
+          <a:lnRef idx="1">
+            <a:schemeClr val="accent1"/>
+          </a:lnRef>
+          <a:fillRef idx="3">
+            <a:schemeClr val="accent1"/>
+          </a:fillRef>
+          <a:effectRef idx="2">
+            <a:schemeClr val="accent1"/>
+          </a:effectRef>
+          <a:fontRef idx="minor">
+            <a:schemeClr val="lt1"/>
+          </a:fontRef>
+        </p:style>
+        <p:txBody>
+          <a:bodyPr rtlCol="0" anchor="ctr"/>
+          <a:lstStyle/>
+          <a:p>
+            <a:pPr algn="ctr"/>
+          </a:p>
+        </p:txBody>
+      </p:sp>
+      <p:sp>
+        <p:nvSpPr>
+          <p:cNvPr id="18" name="TextBox 17"/>
+          <p:cNvSpPr txBox="1"/>
+          <p:nvPr/>
+        </p:nvSpPr>
+        <p:spPr>
+          <a:xfrm>
+            <a:off x="822960" y="5989320"/>
+            <a:ext cx="10545775" cy="384048"/>
+          </a:xfrm>
+          <a:prstGeom prst="rect">
+            <a:avLst/>
+          </a:prstGeom>
+          <a:noFill/>
+        </p:spPr>
+        <p:txBody>
+          <a:bodyPr wrap="none">
+            <a:spAutoFit/>
+          </a:bodyPr>
+          <a:lstStyle/>
+          <a:p>
+            <a:pPr>
+              <a:defRPr sz="950" b="1">
+                <a:solidFill>
+                  <a:srgbClr val="000000"/>
+                </a:solidFill>
+                <a:latin typeface="Segoe UI"/>
+              </a:defRPr>
+            </a:pPr>
+            <a:r>
+              <a:t>▶ KLIK UNTUK MEMBUKA KODE LENGKAP (slide_03_grid_responsif_breakpoints.html)</a:t>
             </a:r>
           </a:p>
         </p:txBody>
